--- a/lectures/ReinforcementLearning.pptx
+++ b/lectures/ReinforcementLearning.pptx
@@ -5965,7 +5965,7 @@
           <a:p>
             <a:fld id="{A0F38EB4-1D36-4B3A-ACBA-60C17611C5FF}" type="datetimeFigureOut">
               <a:rPr lang="en-US" smtClean="0"/>
-              <a:t>4/8/2026</a:t>
+              <a:t>4/9/2026</a:t>
             </a:fld>
             <a:endParaRPr lang="en-US"/>
           </a:p>
@@ -6556,7 +6556,7 @@
           <a:p>
             <a:fld id="{3DB82215-7059-470B-A089-3D5FBCE3F595}" type="datetimeFigureOut">
               <a:rPr lang="en-US" smtClean="0"/>
-              <a:t>4/8/2026</a:t>
+              <a:t>4/9/2026</a:t>
             </a:fld>
             <a:endParaRPr lang="en-US"/>
           </a:p>
@@ -6764,7 +6764,7 @@
           <a:p>
             <a:fld id="{3DB82215-7059-470B-A089-3D5FBCE3F595}" type="datetimeFigureOut">
               <a:rPr lang="en-US" smtClean="0"/>
-              <a:t>4/8/2026</a:t>
+              <a:t>4/9/2026</a:t>
             </a:fld>
             <a:endParaRPr lang="en-US"/>
           </a:p>
@@ -7020,7 +7020,7 @@
           <a:p>
             <a:fld id="{3DB82215-7059-470B-A089-3D5FBCE3F595}" type="datetimeFigureOut">
               <a:rPr lang="en-US" smtClean="0"/>
-              <a:t>4/8/2026</a:t>
+              <a:t>4/9/2026</a:t>
             </a:fld>
             <a:endParaRPr lang="en-US"/>
           </a:p>
@@ -7225,7 +7225,7 @@
           <a:p>
             <a:fld id="{3DB82215-7059-470B-A089-3D5FBCE3F595}" type="datetimeFigureOut">
               <a:rPr lang="en-US" smtClean="0"/>
-              <a:t>4/8/2026</a:t>
+              <a:t>4/9/2026</a:t>
             </a:fld>
             <a:endParaRPr lang="en-US"/>
           </a:p>
@@ -7568,7 +7568,7 @@
           <a:p>
             <a:fld id="{3DB82215-7059-470B-A089-3D5FBCE3F595}" type="datetimeFigureOut">
               <a:rPr lang="en-US" smtClean="0"/>
-              <a:t>4/8/2026</a:t>
+              <a:t>4/9/2026</a:t>
             </a:fld>
             <a:endParaRPr lang="en-US"/>
           </a:p>
@@ -7843,7 +7843,7 @@
           <a:p>
             <a:fld id="{3DB82215-7059-470B-A089-3D5FBCE3F595}" type="datetimeFigureOut">
               <a:rPr lang="en-US" smtClean="0"/>
-              <a:t>4/8/2026</a:t>
+              <a:t>4/9/2026</a:t>
             </a:fld>
             <a:endParaRPr lang="en-US"/>
           </a:p>
@@ -8222,7 +8222,7 @@
           <a:p>
             <a:fld id="{3DB82215-7059-470B-A089-3D5FBCE3F595}" type="datetimeFigureOut">
               <a:rPr lang="en-US" smtClean="0"/>
-              <a:t>4/8/2026</a:t>
+              <a:t>4/9/2026</a:t>
             </a:fld>
             <a:endParaRPr lang="en-US"/>
           </a:p>
@@ -8340,7 +8340,7 @@
           <a:p>
             <a:fld id="{3DB82215-7059-470B-A089-3D5FBCE3F595}" type="datetimeFigureOut">
               <a:rPr lang="en-US" smtClean="0"/>
-              <a:t>4/8/2026</a:t>
+              <a:t>4/9/2026</a:t>
             </a:fld>
             <a:endParaRPr lang="en-US"/>
           </a:p>
@@ -8511,7 +8511,7 @@
           <a:p>
             <a:fld id="{3DB82215-7059-470B-A089-3D5FBCE3F595}" type="datetimeFigureOut">
               <a:rPr lang="en-US" smtClean="0"/>
-              <a:t>4/8/2026</a:t>
+              <a:t>4/9/2026</a:t>
             </a:fld>
             <a:endParaRPr lang="en-US"/>
           </a:p>
@@ -8865,7 +8865,7 @@
           <a:p>
             <a:fld id="{3DB82215-7059-470B-A089-3D5FBCE3F595}" type="datetimeFigureOut">
               <a:rPr lang="en-US" smtClean="0"/>
-              <a:t>4/8/2026</a:t>
+              <a:t>4/9/2026</a:t>
             </a:fld>
             <a:endParaRPr lang="en-US"/>
           </a:p>
@@ -9242,7 +9242,7 @@
           <a:p>
             <a:fld id="{3DB82215-7059-470B-A089-3D5FBCE3F595}" type="datetimeFigureOut">
               <a:rPr lang="en-US" smtClean="0"/>
-              <a:t>4/8/2026</a:t>
+              <a:t>4/9/2026</a:t>
             </a:fld>
             <a:endParaRPr lang="en-US"/>
           </a:p>
@@ -9543,7 +9543,7 @@
           <a:p>
             <a:fld id="{3DB82215-7059-470B-A089-3D5FBCE3F595}" type="datetimeFigureOut">
               <a:rPr lang="en-US" smtClean="0"/>
-              <a:t>4/8/2026</a:t>
+              <a:t>4/9/2026</a:t>
             </a:fld>
             <a:endParaRPr lang="en-US"/>
           </a:p>
@@ -14802,12 +14802,31 @@
                         </m:r>
                       </m:sup>
                     </m:sSubSup>
-                    <m:r>
-                      <a:rPr lang="en-US" b="0" i="1" smtClean="0">
-                        <a:latin typeface="Cambria Math" panose="02040503050406030204" pitchFamily="18" charset="0"/>
-                      </a:rPr>
-                      <m:t>𝛾</m:t>
-                    </m:r>
+                    <m:sSup>
+                      <m:sSupPr>
+                        <m:ctrlPr>
+                          <a:rPr lang="en-US" b="0" i="1" smtClean="0">
+                            <a:latin typeface="Cambria Math" panose="02040503050406030204" pitchFamily="18" charset="0"/>
+                          </a:rPr>
+                        </m:ctrlPr>
+                      </m:sSupPr>
+                      <m:e>
+                        <m:r>
+                          <a:rPr lang="en-US" b="0" i="1" smtClean="0">
+                            <a:latin typeface="Cambria Math" panose="02040503050406030204" pitchFamily="18" charset="0"/>
+                          </a:rPr>
+                          <m:t>𝛾</m:t>
+                        </m:r>
+                      </m:e>
+                      <m:sup>
+                        <m:r>
+                          <a:rPr lang="en-US" b="0" i="1" smtClean="0">
+                            <a:latin typeface="Cambria Math" panose="02040503050406030204" pitchFamily="18" charset="0"/>
+                          </a:rPr>
+                          <m:t>𝑘</m:t>
+                        </m:r>
+                      </m:sup>
+                    </m:sSup>
                     <m:r>
                       <a:rPr lang="en-US" b="0" i="1" smtClean="0">
                         <a:latin typeface="Cambria Math" panose="02040503050406030204" pitchFamily="18" charset="0"/>
